--- a/instructors/07_Data-in-excel_v4.pptx
+++ b/instructors/07_Data-in-excel_v4.pptx
@@ -13043,41 +13043,6 @@
           </a:p>
         </p:txBody>
       </p:sp>
-      <p:pic>
-        <p:nvPicPr>
-          <p:cNvPr id="9" name="Picture 8">
-            <a:extLst>
-              <a:ext uri="{FF2B5EF4-FFF2-40B4-BE49-F238E27FC236}">
-                <a16:creationId xmlns:a16="http://schemas.microsoft.com/office/drawing/2014/main" id="{3CCCF99C-50A6-F241-9272-50FCF634B3A9}"/>
-              </a:ext>
-            </a:extLst>
-          </p:cNvPr>
-          <p:cNvPicPr>
-            <a:picLocks noChangeAspect="1"/>
-          </p:cNvPicPr>
-          <p:nvPr/>
-        </p:nvPicPr>
-        <p:blipFill rotWithShape="1">
-          <a:blip r:embed="rId2" cstate="print">
-            <a:extLst>
-              <a:ext uri="{28A0092B-C50C-407E-A947-70E740481C1C}">
-                <a14:useLocalDpi xmlns:a14="http://schemas.microsoft.com/office/drawing/2010/main" val="0"/>
-              </a:ext>
-            </a:extLst>
-          </a:blip>
-          <a:srcRect l="39328" t="14253" r="54290" b="8379"/>
-          <a:stretch/>
-        </p:blipFill>
-        <p:spPr>
-          <a:xfrm>
-            <a:off x="6711351" y="1621766"/>
-            <a:ext cx="566904" cy="3614468"/>
-          </a:xfrm>
-          <a:prstGeom prst="rect">
-            <a:avLst/>
-          </a:prstGeom>
-        </p:spPr>
-      </p:pic>
       <p:sp>
         <p:nvSpPr>
           <p:cNvPr id="6" name="Title 1">
@@ -13111,6 +13076,41 @@
           </a:p>
         </p:txBody>
       </p:sp>
+      <p:pic>
+        <p:nvPicPr>
+          <p:cNvPr id="2" name="Picture 1" descr="A screenshot of a spreadsheet&#10;&#10;Description automatically generated">
+            <a:extLst>
+              <a:ext uri="{FF2B5EF4-FFF2-40B4-BE49-F238E27FC236}">
+                <a16:creationId xmlns:a16="http://schemas.microsoft.com/office/drawing/2014/main" id="{8F69F867-11DF-7A99-7A8F-AF9CEF571666}"/>
+              </a:ext>
+            </a:extLst>
+          </p:cNvPr>
+          <p:cNvPicPr>
+            <a:picLocks noChangeAspect="1"/>
+          </p:cNvPicPr>
+          <p:nvPr/>
+        </p:nvPicPr>
+        <p:blipFill>
+          <a:blip r:embed="rId2">
+            <a:extLst>
+              <a:ext uri="{28A0092B-C50C-407E-A947-70E740481C1C}">
+                <a14:useLocalDpi xmlns:a14="http://schemas.microsoft.com/office/drawing/2010/main" val="0"/>
+              </a:ext>
+            </a:extLst>
+          </a:blip>
+          <a:srcRect l="37434" t="17546" r="57307" b="9287"/>
+          <a:stretch/>
+        </p:blipFill>
+        <p:spPr>
+          <a:xfrm>
+            <a:off x="6533957" y="1319245"/>
+            <a:ext cx="792535" cy="5053047"/>
+          </a:xfrm>
+          <a:prstGeom prst="rect">
+            <a:avLst/>
+          </a:prstGeom>
+        </p:spPr>
+      </p:pic>
     </p:spTree>
     <p:extLst>
       <p:ext uri="{BB962C8B-B14F-4D97-AF65-F5344CB8AC3E}">
